--- a/sesion-09/Sesion_09.pptx
+++ b/sesion-09/Sesion_09.pptx
@@ -15,9 +15,10 @@
     <p:sldId id="263" r:id="rId9"/>
     <p:sldId id="264" r:id="rId10"/>
     <p:sldId id="265" r:id="rId11"/>
+    <p:sldId id="266" r:id="rId12"/>
   </p:sldIdLst>
   <p:notesMasterIdLst>
-    <p:notesMasterId r:id="rId12"/>
+    <p:notesMasterId r:id="rId13"/>
   </p:notesMasterIdLst>
   <p:sldSz cx="12192000" cy="6858000"/>
   <p:notesSz cx="6858000" cy="12192000"/>
@@ -641,6 +642,94 @@
 </p:notes>
 </file>
 
+<file path=ppt/notesSlides/notesSlide11.xml><?xml version="1.0" encoding="utf-8"?>
+<p:notes xmlns:a="http://schemas.openxmlformats.org/drawingml/2006/main" xmlns:r="http://schemas.openxmlformats.org/officeDocument/2006/relationships" xmlns:p="http://schemas.openxmlformats.org/presentationml/2006/main">
+  <p:cSld>
+    <p:spTree>
+      <p:nvGrpSpPr>
+        <p:cNvPr id="1" name=""/>
+        <p:cNvGrpSpPr/>
+        <p:nvPr/>
+      </p:nvGrpSpPr>
+      <p:grpSpPr>
+        <a:xfrm>
+          <a:off x="0" y="0"/>
+          <a:ext cx="0" cy="0"/>
+          <a:chOff x="0" y="0"/>
+          <a:chExt cx="0" cy="0"/>
+        </a:xfrm>
+      </p:grpSpPr>
+      <p:sp>
+        <p:nvSpPr>
+          <p:cNvPr id="2" name="Slide Image Placeholder 1"/>
+          <p:cNvSpPr>
+            <a:spLocks noGrp="1" noRot="1" noChangeAspect="1"/>
+          </p:cNvSpPr>
+          <p:nvPr>
+            <p:ph type="sldImg"/>
+          </p:nvPr>
+        </p:nvSpPr>
+        <p:spPr/>
+      </p:sp>
+      <p:sp>
+        <p:nvSpPr>
+          <p:cNvPr id="3" name="Notes Placeholder 2"/>
+          <p:cNvSpPr>
+            <a:spLocks noGrp="1"/>
+          </p:cNvSpPr>
+          <p:nvPr>
+            <p:ph type="body" idx="1"/>
+          </p:nvPr>
+        </p:nvSpPr>
+        <p:spPr/>
+        <p:txBody>
+          <a:bodyPr/>
+          <a:lstStyle/>
+          <a:p>
+            <a:r>
+              <a:rPr lang="en-US" dirty="0"/>
+              <a:t>Cinco minutos, la bisagra hacia el Modulo IV. Encargue el proyecto integrador como la tarea que empieza hoy y madura las tres sesiones siguientes. Insista en la libertad de forma: cada equipo elige su caso, su enfoque y su formato; no hay molde. Las cinco preguntas son la vara: toda buena propuesta las responde. Las dos que mas importan por sus datos reales son la de la frontera y la del semaforo, porque usan microdatos de su ambito y la reproducibilidad y la seguridad del dato no son opcionales. El estandar de reproducibilidad: un colega con acceso lo reproduce desde la frontera, con crudos y credenciales fuera del repo. La guia de una pagina lo detalla; la entrega es libre en forma.</a:t>
+            </a:r>
+            <a:endParaRPr lang="en-US" dirty="0"/>
+          </a:p>
+        </p:txBody>
+      </p:sp>
+      <p:sp>
+        <p:nvSpPr>
+          <p:cNvPr id="4" name="Slide Number Placeholder 3"/>
+          <p:cNvSpPr>
+            <a:spLocks noGrp="1"/>
+          </p:cNvSpPr>
+          <p:nvPr>
+            <p:ph type="sldNum" sz="quarter" idx="10"/>
+          </p:nvPr>
+        </p:nvSpPr>
+        <p:spPr/>
+        <p:txBody>
+          <a:bodyPr/>
+          <a:lstStyle/>
+          <a:p>
+            <a:fld id="{F7021451-1387-4CA6-816F-3879F97B5CBC}" type="slidenum">
+              <a:rPr lang="en-US"/>
+              <a:t>11</a:t>
+            </a:fld>
+            <a:endParaRPr lang="en-US"/>
+          </a:p>
+        </p:txBody>
+      </p:sp>
+    </p:spTree>
+    <p:extLst>
+      <p:ext uri="{BB962C8B-B14F-4D97-AF65-F5344CB8AC3E}">
+        <p14:creationId xmlns:p14="http://schemas.microsoft.com/office/powerpoint/2010/main" val="1024086991"/>
+      </p:ext>
+    </p:extLst>
+  </p:cSld>
+  <p:clrMapOvr>
+    <a:masterClrMapping/>
+  </p:clrMapOvr>
+</p:notes>
+</file>
+
 <file path=ppt/notesSlides/notesSlide2.xml><?xml version="1.0" encoding="utf-8"?>
 <p:notes xmlns:a="http://schemas.openxmlformats.org/drawingml/2006/main" xmlns:r="http://schemas.openxmlformats.org/officeDocument/2006/relationships" xmlns:p="http://schemas.openxmlformats.org/presentationml/2006/main">
   <p:cSld>
@@ -2365,9 +2454,536 @@
                 <a:ea typeface="Calibri" pitchFamily="34" charset="-122"/>
                 <a:cs typeface="Calibri" pitchFamily="34" charset="-120"/>
               </a:rPr>
-              <a:t>Con esto cierra el bloque cuantitativo. Estas mismas prácticas, diseño y reproducibilidad, sostienen el proyecto final del curso.</a:t>
+              <a:t>El bloque cuantitativo cierra aquí. Y hoy arranca el proyecto integrador: la tarea de esta sesión abre el Módulo IV, y estas prácticas lo sostienen.</a:t>
             </a:r>
             <a:endParaRPr lang="en-US" sz="1250" dirty="0"/>
+          </a:p>
+        </p:txBody>
+      </p:sp>
+    </p:spTree>
+  </p:cSld>
+  <p:clrMapOvr>
+    <a:masterClrMapping/>
+  </p:clrMapOvr>
+</p:sld>
+</file>
+
+<file path=ppt/slides/slide11.xml><?xml version="1.0" encoding="utf-8"?>
+<p:sld xmlns:a="http://schemas.openxmlformats.org/drawingml/2006/main" xmlns:r="http://schemas.openxmlformats.org/officeDocument/2006/relationships" xmlns:p="http://schemas.openxmlformats.org/presentationml/2006/main">
+  <p:cSld name="Slide 11">
+    <p:bg>
+      <p:bgPr>
+        <a:solidFill>
+          <a:srgbClr val="FFFFFF"/>
+        </a:solidFill>
+      </p:bgPr>
+    </p:bg>
+    <p:spTree>
+      <p:nvGrpSpPr>
+        <p:cNvPr id="1" name=""/>
+        <p:cNvGrpSpPr/>
+        <p:nvPr/>
+      </p:nvGrpSpPr>
+      <p:grpSpPr>
+        <a:xfrm>
+          <a:off x="0" y="0"/>
+          <a:ext cx="0" cy="0"/>
+          <a:chOff x="0" y="0"/>
+          <a:chExt cx="0" cy="0"/>
+        </a:xfrm>
+      </p:grpSpPr>
+      <p:sp>
+        <p:nvSpPr>
+          <p:cNvPr id="2" name="Text 0"/>
+          <p:cNvSpPr txBox="1"/>
+          <p:nvPr/>
+        </p:nvSpPr>
+        <p:spPr>
+          <a:xfrm>
+            <a:off x="548640" y="384048"/>
+            <a:ext cx="11091672" cy="640080"/>
+          </a:xfrm>
+          <a:prstGeom prst="rect">
+            <a:avLst/>
+          </a:prstGeom>
+          <a:noFill/>
+          <a:ln/>
+        </p:spPr>
+        <p:txBody>
+          <a:bodyPr wrap="square" lIns="0" tIns="0" rIns="0" bIns="0" rtlCol="0" anchor="ctr"/>
+          <a:lstStyle/>
+          <a:p>
+            <a:pPr indent="0" marL="0">
+              <a:buNone/>
+            </a:pPr>
+            <a:r>
+              <a:rPr lang="en-US" sz="2900" b="1" dirty="0">
+                <a:solidFill>
+                  <a:srgbClr val="1E2A35"/>
+                </a:solidFill>
+                <a:latin typeface="Calibri" pitchFamily="34" charset="0"/>
+                <a:ea typeface="Calibri" pitchFamily="34" charset="-122"/>
+                <a:cs typeface="Calibri" pitchFamily="34" charset="-120"/>
+              </a:rPr>
+              <a:t>Tu tarea: el proyecto integrador arranca hoy</a:t>
+            </a:r>
+            <a:endParaRPr lang="en-US" sz="2900" dirty="0"/>
+          </a:p>
+        </p:txBody>
+      </p:sp>
+      <p:sp>
+        <p:nvSpPr>
+          <p:cNvPr id="3" name="Text 1"/>
+          <p:cNvSpPr txBox="1"/>
+          <p:nvPr/>
+        </p:nvSpPr>
+        <p:spPr>
+          <a:xfrm>
+            <a:off x="548640" y="1042416"/>
+            <a:ext cx="11091672" cy="566928"/>
+          </a:xfrm>
+          <a:prstGeom prst="rect">
+            <a:avLst/>
+          </a:prstGeom>
+          <a:noFill/>
+          <a:ln/>
+        </p:spPr>
+        <p:txBody>
+          <a:bodyPr wrap="square" lIns="0" tIns="0" rIns="0" bIns="0" rtlCol="0" anchor="ctr"/>
+          <a:lstStyle/>
+          <a:p>
+            <a:pPr indent="0" marL="0">
+              <a:lnSpc>
+                <a:spcPct val="100000"/>
+              </a:lnSpc>
+              <a:buNone/>
+            </a:pPr>
+            <a:r>
+              <a:rPr lang="en-US" sz="1400" dirty="0">
+                <a:solidFill>
+                  <a:srgbClr val="60707E"/>
+                </a:solidFill>
+                <a:latin typeface="Calibri" pitchFamily="34" charset="0"/>
+                <a:ea typeface="Calibri" pitchFamily="34" charset="-122"/>
+                <a:cs typeface="Calibri" pitchFamily="34" charset="-120"/>
+              </a:rPr>
+              <a:t>Es la tarea que abre el Módulo IV. La forma la eligen ustedes; el estándar, no.</a:t>
+            </a:r>
+            <a:endParaRPr lang="en-US" sz="1400" dirty="0"/>
+          </a:p>
+        </p:txBody>
+      </p:sp>
+      <p:sp>
+        <p:nvSpPr>
+          <p:cNvPr id="4" name="Shape 2"/>
+          <p:cNvSpPr/>
+          <p:nvPr/>
+        </p:nvSpPr>
+        <p:spPr>
+          <a:xfrm>
+            <a:off x="548640" y="1783080"/>
+            <a:ext cx="11091672" cy="868680"/>
+          </a:xfrm>
+          <a:prstGeom prst="roundRect">
+            <a:avLst>
+              <a:gd name="adj" fmla="val 6316"/>
+            </a:avLst>
+          </a:prstGeom>
+          <a:solidFill>
+            <a:srgbClr val="15293B"/>
+          </a:solidFill>
+          <a:ln w="9525">
+            <a:solidFill>
+              <a:srgbClr val="D5DCE3"/>
+            </a:solidFill>
+            <a:prstDash val="solid"/>
+          </a:ln>
+        </p:spPr>
+      </p:sp>
+      <p:sp>
+        <p:nvSpPr>
+          <p:cNvPr id="5" name="Text 3"/>
+          <p:cNvSpPr txBox="1"/>
+          <p:nvPr/>
+        </p:nvSpPr>
+        <p:spPr>
+          <a:xfrm>
+            <a:off x="868680" y="1783080"/>
+            <a:ext cx="10451592" cy="868680"/>
+          </a:xfrm>
+          <a:prstGeom prst="rect">
+            <a:avLst/>
+          </a:prstGeom>
+          <a:noFill/>
+          <a:ln/>
+        </p:spPr>
+        <p:txBody>
+          <a:bodyPr wrap="square" lIns="0" tIns="0" rIns="0" bIns="0" rtlCol="0" anchor="ctr"/>
+          <a:lstStyle/>
+          <a:p>
+            <a:pPr indent="0" marL="0">
+              <a:lnSpc>
+                <a:spcPct val="105000"/>
+              </a:lnSpc>
+              <a:buNone/>
+            </a:pPr>
+            <a:r>
+              <a:rPr lang="en-US" sz="1350" b="1" dirty="0">
+                <a:solidFill>
+                  <a:srgbClr val="FFFFFF"/>
+                </a:solidFill>
+                <a:latin typeface="Calibri" pitchFamily="34" charset="0"/>
+                <a:ea typeface="Calibri" pitchFamily="34" charset="-122"/>
+                <a:cs typeface="Calibri" pitchFamily="34" charset="-120"/>
+              </a:rPr>
+              <a:t>En equipo, elijan una evaluación de política de su ámbito, con IA. </a:t>
+            </a:r>
+            <a:pPr indent="0" marL="0">
+              <a:lnSpc>
+                <a:spcPct val="105000"/>
+              </a:lnSpc>
+              <a:buNone/>
+            </a:pPr>
+            <a:r>
+              <a:rPr lang="en-US" sz="1350" dirty="0">
+                <a:solidFill>
+                  <a:srgbClr val="E4EAF0"/>
+                </a:solidFill>
+                <a:latin typeface="Calibri" pitchFamily="34" charset="0"/>
+                <a:ea typeface="Calibri" pitchFamily="34" charset="-122"/>
+                <a:cs typeface="Calibri" pitchFamily="34" charset="-120"/>
+              </a:rPr>
+              <a:t>Cuali, cuanti o mixto: la forma es libre. Lo que sigue es la vara de medir, no un molde.</a:t>
+            </a:r>
+            <a:endParaRPr lang="en-US" sz="1350" dirty="0"/>
+          </a:p>
+        </p:txBody>
+      </p:sp>
+      <p:sp>
+        <p:nvSpPr>
+          <p:cNvPr id="6" name="Shape 4"/>
+          <p:cNvSpPr/>
+          <p:nvPr/>
+        </p:nvSpPr>
+        <p:spPr>
+          <a:xfrm>
+            <a:off x="548640" y="2834640"/>
+            <a:ext cx="11091672" cy="2560320"/>
+          </a:xfrm>
+          <a:prstGeom prst="roundRect">
+            <a:avLst>
+              <a:gd name="adj" fmla="val 2143"/>
+            </a:avLst>
+          </a:prstGeom>
+          <a:solidFill>
+            <a:srgbClr val="EEF2F5"/>
+          </a:solidFill>
+          <a:ln w="9525">
+            <a:solidFill>
+              <a:srgbClr val="D5DCE3"/>
+            </a:solidFill>
+            <a:prstDash val="solid"/>
+          </a:ln>
+        </p:spPr>
+      </p:sp>
+      <p:sp>
+        <p:nvSpPr>
+          <p:cNvPr id="7" name="Text 5"/>
+          <p:cNvSpPr txBox="1"/>
+          <p:nvPr/>
+        </p:nvSpPr>
+        <p:spPr>
+          <a:xfrm>
+            <a:off x="868680" y="2999232"/>
+            <a:ext cx="10451592" cy="365760"/>
+          </a:xfrm>
+          <a:prstGeom prst="rect">
+            <a:avLst/>
+          </a:prstGeom>
+          <a:noFill/>
+          <a:ln/>
+        </p:spPr>
+        <p:txBody>
+          <a:bodyPr wrap="square" lIns="0" tIns="0" rIns="0" bIns="0" rtlCol="0" anchor="ctr"/>
+          <a:lstStyle/>
+          <a:p>
+            <a:pPr indent="0" marL="0">
+              <a:buNone/>
+            </a:pPr>
+            <a:r>
+              <a:rPr lang="en-US" sz="1550" b="1" dirty="0">
+                <a:solidFill>
+                  <a:srgbClr val="CB5E2E"/>
+                </a:solidFill>
+                <a:latin typeface="Calibri" pitchFamily="34" charset="0"/>
+                <a:ea typeface="Calibri" pitchFamily="34" charset="-122"/>
+                <a:cs typeface="Calibri" pitchFamily="34" charset="-120"/>
+              </a:rPr>
+              <a:t>Cinco preguntas que toda buena propuesta responde</a:t>
+            </a:r>
+            <a:endParaRPr lang="en-US" sz="1550" dirty="0"/>
+          </a:p>
+        </p:txBody>
+      </p:sp>
+      <p:sp>
+        <p:nvSpPr>
+          <p:cNvPr id="8" name="Text 6"/>
+          <p:cNvSpPr txBox="1"/>
+          <p:nvPr/>
+        </p:nvSpPr>
+        <p:spPr>
+          <a:xfrm>
+            <a:off x="868680" y="3401568"/>
+            <a:ext cx="10451592" cy="1920240"/>
+          </a:xfrm>
+          <a:prstGeom prst="rect">
+            <a:avLst/>
+          </a:prstGeom>
+          <a:noFill/>
+          <a:ln/>
+        </p:spPr>
+        <p:txBody>
+          <a:bodyPr wrap="square" lIns="0" tIns="0" rIns="0" bIns="0" rtlCol="0" anchor="ctr"/>
+          <a:lstStyle/>
+          <a:p>
+            <a:pPr marL="342900" indent="-342900">
+              <a:lnSpc>
+                <a:spcPct val="102000"/>
+              </a:lnSpc>
+              <a:spcAft>
+                <a:spcPts val="700"/>
+              </a:spcAft>
+              <a:buSzPct val="100000"/>
+              <a:buChar char="•"/>
+            </a:pPr>
+            <a:r>
+              <a:rPr lang="en-US" sz="1250" dirty="0">
+                <a:solidFill>
+                  <a:srgbClr val="1E2A35"/>
+                </a:solidFill>
+                <a:latin typeface="Calibri" pitchFamily="34" charset="0"/>
+                <a:ea typeface="Calibri" pitchFamily="34" charset="-122"/>
+                <a:cs typeface="Calibri" pitchFamily="34" charset="-120"/>
+              </a:rPr>
+              <a:t>¿Cuál es la pregunta de evaluación? Qué política, y qué quieren saber de ella.</a:t>
+            </a:r>
+            <a:endParaRPr lang="en-US" sz="1250" dirty="0"/>
+          </a:p>
+          <a:p>
+            <a:pPr marL="342900" indent="-342900">
+              <a:lnSpc>
+                <a:spcPct val="102000"/>
+              </a:lnSpc>
+              <a:spcAft>
+                <a:spcPts val="700"/>
+              </a:spcAft>
+              <a:buSzPct val="100000"/>
+              <a:buChar char="•"/>
+            </a:pPr>
+            <a:r>
+              <a:rPr lang="en-US" sz="1250" dirty="0">
+                <a:solidFill>
+                  <a:srgbClr val="1E2A35"/>
+                </a:solidFill>
+                <a:latin typeface="Calibri" pitchFamily="34" charset="0"/>
+                <a:ea typeface="Calibri" pitchFamily="34" charset="-122"/>
+                <a:cs typeface="Calibri" pitchFamily="34" charset="-120"/>
+              </a:rPr>
+              <a:t>¿El enfoque es cualitativo, cuantitativo o mixto, y por qué ese y no otro?</a:t>
+            </a:r>
+            <a:endParaRPr lang="en-US" sz="1250" dirty="0"/>
+          </a:p>
+          <a:p>
+            <a:pPr marL="342900" indent="-342900">
+              <a:lnSpc>
+                <a:spcPct val="102000"/>
+              </a:lnSpc>
+              <a:spcAft>
+                <a:spcPts val="700"/>
+              </a:spcAft>
+              <a:buSzPct val="100000"/>
+              <a:buChar char="•"/>
+            </a:pPr>
+            <a:r>
+              <a:rPr lang="en-US" sz="1250" dirty="0">
+                <a:solidFill>
+                  <a:srgbClr val="1E2A35"/>
+                </a:solidFill>
+                <a:latin typeface="Calibri" pitchFamily="34" charset="0"/>
+                <a:ea typeface="Calibri" pitchFamily="34" charset="-122"/>
+                <a:cs typeface="Calibri" pitchFamily="34" charset="-120"/>
+              </a:rPr>
+              <a:t>¿Qué datos de su ámbito usan, y dónde está la frontera de reproducibilidad (el dato limpio del que parte el análisis)?</a:t>
+            </a:r>
+            <a:endParaRPr lang="en-US" sz="1250" dirty="0"/>
+          </a:p>
+          <a:p>
+            <a:pPr marL="342900" indent="-342900">
+              <a:lnSpc>
+                <a:spcPct val="102000"/>
+              </a:lnSpc>
+              <a:spcAft>
+                <a:spcPts val="700"/>
+              </a:spcAft>
+              <a:buSzPct val="100000"/>
+              <a:buChar char="•"/>
+            </a:pPr>
+            <a:r>
+              <a:rPr lang="en-US" sz="1250" dirty="0">
+                <a:solidFill>
+                  <a:srgbClr val="1E2A35"/>
+                </a:solidFill>
+                <a:latin typeface="Calibri" pitchFamily="34" charset="0"/>
+                <a:ea typeface="Calibri" pitchFamily="34" charset="-122"/>
+                <a:cs typeface="Calibri" pitchFamily="34" charset="-120"/>
+              </a:rPr>
+              <a:t>¿Dónde caen en el semáforo? Si son microdatos reales, es amarillo, y eso condiciona qué herramientas pueden tocarlos.</a:t>
+            </a:r>
+            <a:endParaRPr lang="en-US" sz="1250" dirty="0"/>
+          </a:p>
+          <a:p>
+            <a:pPr marL="342900" indent="-342900">
+              <a:lnSpc>
+                <a:spcPct val="102000"/>
+              </a:lnSpc>
+              <a:spcAft>
+                <a:spcPts val="700"/>
+              </a:spcAft>
+              <a:buSzPct val="100000"/>
+              <a:buChar char="•"/>
+            </a:pPr>
+            <a:r>
+              <a:rPr lang="en-US" sz="1250" dirty="0">
+                <a:solidFill>
+                  <a:srgbClr val="1E2A35"/>
+                </a:solidFill>
+                <a:latin typeface="Calibri" pitchFamily="34" charset="0"/>
+                <a:ea typeface="Calibri" pitchFamily="34" charset="-122"/>
+                <a:cs typeface="Calibri" pitchFamily="34" charset="-120"/>
+              </a:rPr>
+              <a:t>¿Cómo será el resultado reproducible y auditable?</a:t>
+            </a:r>
+            <a:endParaRPr lang="en-US" sz="1250" dirty="0"/>
+          </a:p>
+        </p:txBody>
+      </p:sp>
+      <p:sp>
+        <p:nvSpPr>
+          <p:cNvPr id="9" name="Shape 7"/>
+          <p:cNvSpPr/>
+          <p:nvPr/>
+        </p:nvSpPr>
+        <p:spPr>
+          <a:xfrm>
+            <a:off x="548640" y="6053328"/>
+            <a:ext cx="11091672" cy="603504"/>
+          </a:xfrm>
+          <a:prstGeom prst="rect">
+            <a:avLst/>
+          </a:prstGeom>
+          <a:solidFill>
+            <a:srgbClr val="FBEEE5"/>
+          </a:solidFill>
+          <a:ln/>
+        </p:spPr>
+      </p:sp>
+      <p:sp>
+        <p:nvSpPr>
+          <p:cNvPr id="10" name="Shape 8"/>
+          <p:cNvSpPr/>
+          <p:nvPr/>
+        </p:nvSpPr>
+        <p:spPr>
+          <a:xfrm>
+            <a:off x="749808" y="6272784"/>
+            <a:ext cx="164592" cy="164592"/>
+          </a:xfrm>
+          <a:prstGeom prst="roundRect">
+            <a:avLst>
+              <a:gd name="adj" fmla="val 22222"/>
+            </a:avLst>
+          </a:prstGeom>
+          <a:solidFill>
+            <a:srgbClr val="CB5E2E"/>
+          </a:solidFill>
+          <a:ln/>
+        </p:spPr>
+      </p:sp>
+      <p:sp>
+        <p:nvSpPr>
+          <p:cNvPr id="11" name="Text 9"/>
+          <p:cNvSpPr txBox="1"/>
+          <p:nvPr/>
+        </p:nvSpPr>
+        <p:spPr>
+          <a:xfrm>
+            <a:off x="1051560" y="6053328"/>
+            <a:ext cx="10405872" cy="603504"/>
+          </a:xfrm>
+          <a:prstGeom prst="rect">
+            <a:avLst/>
+          </a:prstGeom>
+          <a:noFill/>
+          <a:ln/>
+        </p:spPr>
+        <p:txBody>
+          <a:bodyPr wrap="square" lIns="0" tIns="0" rIns="0" bIns="0" rtlCol="0" anchor="ctr"/>
+          <a:lstStyle/>
+          <a:p>
+            <a:pPr indent="0" marL="0">
+              <a:buNone/>
+            </a:pPr>
+            <a:r>
+              <a:rPr lang="en-US" sz="1250" dirty="0">
+                <a:solidFill>
+                  <a:srgbClr val="8C3E19"/>
+                </a:solidFill>
+                <a:latin typeface="Calibri" pitchFamily="34" charset="0"/>
+                <a:ea typeface="Calibri" pitchFamily="34" charset="-122"/>
+                <a:cs typeface="Calibri" pitchFamily="34" charset="-120"/>
+              </a:rPr>
+              <a:t>Reproducible de verdad: un colega con acceso lo reproduce desde la frontera. Crudos y credenciales, fuera del repo.</a:t>
+            </a:r>
+            <a:endParaRPr lang="en-US" sz="1250" dirty="0"/>
+          </a:p>
+        </p:txBody>
+      </p:sp>
+      <p:sp>
+        <p:nvSpPr>
+          <p:cNvPr id="12" name="Text 10"/>
+          <p:cNvSpPr txBox="1"/>
+          <p:nvPr/>
+        </p:nvSpPr>
+        <p:spPr>
+          <a:xfrm>
+            <a:off x="548640" y="6419088"/>
+            <a:ext cx="11091672" cy="292608"/>
+          </a:xfrm>
+          <a:prstGeom prst="rect">
+            <a:avLst/>
+          </a:prstGeom>
+          <a:noFill/>
+          <a:ln/>
+        </p:spPr>
+        <p:txBody>
+          <a:bodyPr wrap="square" lIns="0" tIns="0" rIns="0" bIns="0" rtlCol="0" anchor="ctr"/>
+          <a:lstStyle/>
+          <a:p>
+            <a:pPr indent="0" marL="0">
+              <a:buNone/>
+            </a:pPr>
+            <a:r>
+              <a:rPr lang="en-US" sz="900" i="1" dirty="0">
+                <a:solidFill>
+                  <a:srgbClr val="60707E"/>
+                </a:solidFill>
+                <a:latin typeface="Calibri" pitchFamily="34" charset="0"/>
+                <a:ea typeface="Calibri" pitchFamily="34" charset="-122"/>
+                <a:cs typeface="Calibri" pitchFamily="34" charset="-120"/>
+              </a:rPr>
+              <a:t>La forma de entrega es libre. La «Guía para tu propuesta de proyecto integrador» explica el estándar, no un formato que llenar.</a:t>
+            </a:r>
+            <a:endParaRPr lang="en-US" sz="900" dirty="0"/>
           </a:p>
         </p:txBody>
       </p:sp>
